--- a/2026/science work.pptx
+++ b/2026/science work.pptx
@@ -15,7 +15,10 @@
     <p:sldId id="262" r:id="rId9"/>
     <p:sldId id="265" r:id="rId10"/>
     <p:sldId id="264" r:id="rId11"/>
-    <p:sldId id="266" r:id="rId12"/>
+    <p:sldId id="267" r:id="rId12"/>
+    <p:sldId id="266" r:id="rId13"/>
+    <p:sldId id="268" r:id="rId14"/>
+    <p:sldId id="269" r:id="rId15"/>
   </p:sldIdLst>
   <p:sldSz cx="12192000" cy="6858000"/>
   <p:notesSz cx="6858000" cy="9144000"/>
@@ -114,6 +117,11 @@
       </a:defRPr>
     </a:lvl9pPr>
   </p:defaultTextStyle>
+  <p:extLst>
+    <p:ext uri="{EFAFB233-063F-42B5-8137-9DF3F51BA10A}">
+      <p15:sldGuideLst xmlns:p15="http://schemas.microsoft.com/office/powerpoint/2012/main"/>
+    </p:ext>
+  </p:extLst>
 </p:presentation>
 </file>
 
@@ -248,7 +256,7 @@
           <a:p>
             <a:fld id="{CE6AB6B7-FFDE-491E-BD53-665B88B9FB75}" type="datetimeFigureOut">
               <a:rPr lang="ru-RU" smtClean="0"/>
-              <a:t>08.09.2026</a:t>
+              <a:t>15.09.2026</a:t>
             </a:fld>
             <a:endParaRPr lang="ru-RU"/>
           </a:p>
@@ -418,7 +426,7 @@
           <a:p>
             <a:fld id="{CE6AB6B7-FFDE-491E-BD53-665B88B9FB75}" type="datetimeFigureOut">
               <a:rPr lang="ru-RU" smtClean="0"/>
-              <a:t>08.09.2026</a:t>
+              <a:t>15.09.2026</a:t>
             </a:fld>
             <a:endParaRPr lang="ru-RU"/>
           </a:p>
@@ -598,7 +606,7 @@
           <a:p>
             <a:fld id="{CE6AB6B7-FFDE-491E-BD53-665B88B9FB75}" type="datetimeFigureOut">
               <a:rPr lang="ru-RU" smtClean="0"/>
-              <a:t>08.09.2026</a:t>
+              <a:t>15.09.2026</a:t>
             </a:fld>
             <a:endParaRPr lang="ru-RU"/>
           </a:p>
@@ -768,7 +776,7 @@
           <a:p>
             <a:fld id="{CE6AB6B7-FFDE-491E-BD53-665B88B9FB75}" type="datetimeFigureOut">
               <a:rPr lang="ru-RU" smtClean="0"/>
-              <a:t>08.09.2026</a:t>
+              <a:t>15.09.2026</a:t>
             </a:fld>
             <a:endParaRPr lang="ru-RU"/>
           </a:p>
@@ -1014,7 +1022,7 @@
           <a:p>
             <a:fld id="{CE6AB6B7-FFDE-491E-BD53-665B88B9FB75}" type="datetimeFigureOut">
               <a:rPr lang="ru-RU" smtClean="0"/>
-              <a:t>08.09.2026</a:t>
+              <a:t>15.09.2026</a:t>
             </a:fld>
             <a:endParaRPr lang="ru-RU"/>
           </a:p>
@@ -1246,7 +1254,7 @@
           <a:p>
             <a:fld id="{CE6AB6B7-FFDE-491E-BD53-665B88B9FB75}" type="datetimeFigureOut">
               <a:rPr lang="ru-RU" smtClean="0"/>
-              <a:t>08.09.2026</a:t>
+              <a:t>15.09.2026</a:t>
             </a:fld>
             <a:endParaRPr lang="ru-RU"/>
           </a:p>
@@ -1613,7 +1621,7 @@
           <a:p>
             <a:fld id="{CE6AB6B7-FFDE-491E-BD53-665B88B9FB75}" type="datetimeFigureOut">
               <a:rPr lang="ru-RU" smtClean="0"/>
-              <a:t>08.09.2026</a:t>
+              <a:t>15.09.2026</a:t>
             </a:fld>
             <a:endParaRPr lang="ru-RU"/>
           </a:p>
@@ -1731,7 +1739,7 @@
           <a:p>
             <a:fld id="{CE6AB6B7-FFDE-491E-BD53-665B88B9FB75}" type="datetimeFigureOut">
               <a:rPr lang="ru-RU" smtClean="0"/>
-              <a:t>08.09.2026</a:t>
+              <a:t>15.09.2026</a:t>
             </a:fld>
             <a:endParaRPr lang="ru-RU"/>
           </a:p>
@@ -1826,7 +1834,7 @@
           <a:p>
             <a:fld id="{CE6AB6B7-FFDE-491E-BD53-665B88B9FB75}" type="datetimeFigureOut">
               <a:rPr lang="ru-RU" smtClean="0"/>
-              <a:t>08.09.2026</a:t>
+              <a:t>15.09.2026</a:t>
             </a:fld>
             <a:endParaRPr lang="ru-RU"/>
           </a:p>
@@ -2103,7 +2111,7 @@
           <a:p>
             <a:fld id="{CE6AB6B7-FFDE-491E-BD53-665B88B9FB75}" type="datetimeFigureOut">
               <a:rPr lang="ru-RU" smtClean="0"/>
-              <a:t>08.09.2026</a:t>
+              <a:t>15.09.2026</a:t>
             </a:fld>
             <a:endParaRPr lang="ru-RU"/>
           </a:p>
@@ -2356,7 +2364,7 @@
           <a:p>
             <a:fld id="{CE6AB6B7-FFDE-491E-BD53-665B88B9FB75}" type="datetimeFigureOut">
               <a:rPr lang="ru-RU" smtClean="0"/>
-              <a:t>08.09.2026</a:t>
+              <a:t>15.09.2026</a:t>
             </a:fld>
             <a:endParaRPr lang="ru-RU"/>
           </a:p>
@@ -2569,7 +2577,7 @@
           <a:p>
             <a:fld id="{CE6AB6B7-FFDE-491E-BD53-665B88B9FB75}" type="datetimeFigureOut">
               <a:rPr lang="ru-RU" smtClean="0"/>
-              <a:t>08.09.2026</a:t>
+              <a:t>15.09.2026</a:t>
             </a:fld>
             <a:endParaRPr lang="ru-RU"/>
           </a:p>
@@ -3080,7 +3088,9 @@
         </p:nvSpPr>
         <p:spPr/>
         <p:txBody>
-          <a:bodyPr/>
+          <a:bodyPr>
+            <a:normAutofit fontScale="92500" lnSpcReduction="10000"/>
+          </a:bodyPr>
           <a:lstStyle/>
           <a:p>
             <a:pPr marL="0" indent="0">
@@ -3111,7 +3121,22 @@
             </a:r>
             <a:r>
               <a:rPr lang="ru-RU" dirty="0" smtClean="0"/>
-              <a:t> – оппонент</a:t>
+              <a:t> – оппонент, какие </a:t>
+            </a:r>
+            <a:r>
+              <a:rPr lang="ru-RU" dirty="0" err="1" smtClean="0"/>
+              <a:t>опоненты</a:t>
+            </a:r>
+            <a:r>
+              <a:rPr lang="ru-RU" dirty="0" smtClean="0"/>
+              <a:t> могут быть?</a:t>
+            </a:r>
+            <a:br>
+              <a:rPr lang="ru-RU" dirty="0" smtClean="0"/>
+            </a:br>
+            <a:r>
+              <a:rPr lang="ru-RU" dirty="0" smtClean="0"/>
+              <a:t>Из каких областей.</a:t>
             </a:r>
           </a:p>
           <a:p>
@@ -3127,6 +3152,27 @@
             <a:r>
               <a:rPr lang="ru-RU" dirty="0" smtClean="0"/>
               <a:t>Как читатель – определите целевую аудиторию и что для нее мы хотим сказать</a:t>
+            </a:r>
+            <a:br>
+              <a:rPr lang="ru-RU" dirty="0" smtClean="0"/>
+            </a:br>
+            <a:r>
+              <a:rPr lang="ru-RU" dirty="0" smtClean="0"/>
+              <a:t/>
+            </a:r>
+            <a:br>
+              <a:rPr lang="ru-RU" dirty="0" smtClean="0"/>
+            </a:br>
+            <a:r>
+              <a:rPr lang="ru-RU" dirty="0" smtClean="0"/>
+              <a:t> что нового и полезного для научной области сделано.</a:t>
+            </a:r>
+            <a:br>
+              <a:rPr lang="ru-RU" dirty="0" smtClean="0"/>
+            </a:br>
+            <a:r>
+              <a:rPr lang="ru-RU" dirty="0" smtClean="0"/>
+              <a:t>Что нового и полезного для практики сделано и где применимо какие там метрики как мы их оцениваем. </a:t>
             </a:r>
             <a:endParaRPr lang="ru-RU" dirty="0"/>
           </a:p>
@@ -3184,7 +3230,11 @@
           <a:bodyPr/>
           <a:lstStyle/>
           <a:p>
-            <a:endParaRPr lang="ru-RU"/>
+            <a:r>
+              <a:rPr lang="ru-RU" dirty="0" smtClean="0"/>
+              <a:t>Тесты к черновику</a:t>
+            </a:r>
+            <a:endParaRPr lang="ru-RU" dirty="0"/>
           </a:p>
         </p:txBody>
       </p:sp>
@@ -3201,17 +3251,333 @@
         <p:spPr/>
         <p:txBody>
           <a:bodyPr>
-            <a:normAutofit fontScale="25000" lnSpcReduction="20000"/>
+            <a:normAutofit fontScale="55000" lnSpcReduction="20000"/>
           </a:bodyPr>
           <a:lstStyle/>
           <a:p>
             <a:r>
-              <a:rPr lang="ru-RU" dirty="0" smtClean="0"/>
-              <a:t>Ты — опытный исследователь и рецензент журналов IEEE </a:t>
+              <a:rPr lang="ru-RU" dirty="0"/>
+              <a:t>1. есть ли прям критические ошибки. не </a:t>
+            </a:r>
+            <a:r>
+              <a:rPr lang="ru-RU" dirty="0" err="1"/>
+              <a:t>todo</a:t>
+            </a:r>
+            <a:r>
+              <a:rPr lang="ru-RU" dirty="0"/>
+              <a:t> которые мы поправим а именно критические </a:t>
+            </a:r>
+            <a:r>
+              <a:rPr lang="ru-RU" dirty="0" err="1"/>
+              <a:t>оишибки</a:t>
+            </a:r>
+            <a:r>
+              <a:rPr lang="ru-RU" dirty="0"/>
+              <a:t> и </a:t>
+            </a:r>
+            <a:r>
+              <a:rPr lang="ru-RU" dirty="0" err="1"/>
+              <a:t>змечания</a:t>
+            </a:r>
+            <a:r>
+              <a:rPr lang="ru-RU" dirty="0"/>
+              <a:t>?</a:t>
+            </a:r>
+          </a:p>
+          <a:p>
+            <a:r>
+              <a:rPr lang="ru-RU" dirty="0"/>
+              <a:t>есть ли что на них ответить?</a:t>
+            </a:r>
+          </a:p>
+          <a:p>
+            <a:r>
+              <a:rPr lang="ru-RU" dirty="0"/>
+              <a:t>есть ли ошибки по структуре статьи?</a:t>
+            </a:r>
+          </a:p>
+          <a:p>
+            <a:r>
+              <a:rPr lang="ru-RU" dirty="0"/>
+              <a:t>есть ли ошибки в </a:t>
+            </a:r>
+            <a:r>
+              <a:rPr lang="ru-RU" dirty="0" smtClean="0"/>
+              <a:t>терминологии </a:t>
+            </a:r>
+            <a:r>
+              <a:rPr lang="ru-RU" dirty="0"/>
+              <a:t>и обозначения</a:t>
+            </a:r>
+          </a:p>
+          <a:p>
+            <a:r>
+              <a:rPr lang="ru-RU" dirty="0"/>
+              <a:t>есть ли ошибки в стиле статьи</a:t>
+            </a:r>
+          </a:p>
+          <a:p>
+            <a:r>
+              <a:rPr lang="ru-RU" dirty="0"/>
+              <a:t>какие еще можно задать вопросы тебе</a:t>
+            </a:r>
+          </a:p>
+          <a:p>
+            <a:r>
+              <a:rPr lang="ru-RU" dirty="0" smtClean="0"/>
+              <a:t>«</a:t>
+            </a:r>
+            <a:r>
+              <a:rPr lang="ru-RU" dirty="0"/>
+              <a:t>Для каждого заявления аннотации покажи конкретную таблицу, рисунок или эксперимент, который его подтверждает</a:t>
+            </a:r>
+            <a:r>
+              <a:rPr lang="ru-RU" dirty="0" smtClean="0"/>
+              <a:t>».</a:t>
+            </a:r>
+          </a:p>
+          <a:p>
+            <a:r>
+              <a:rPr lang="ru-RU" b="1" dirty="0"/>
+              <a:t>«Раздели замечания на исправляемые текстом, требующие пересчёта и требующие новых физических экспериментов».</a:t>
+            </a:r>
+            <a:r>
+              <a:rPr lang="ru-RU" dirty="0"/>
+              <a:t> </a:t>
+            </a:r>
+            <a:endParaRPr lang="ru-RU" dirty="0" smtClean="0"/>
+          </a:p>
+          <a:p>
+            <a:r>
+              <a:rPr lang="ru-RU" dirty="0" smtClean="0"/>
+              <a:t>«</a:t>
+            </a:r>
+            <a:r>
+              <a:rPr lang="ru-RU" dirty="0"/>
+              <a:t>Какие альтернативные объяснения есть у каждого основного результата и какие из них уже исключены</a:t>
+            </a:r>
+            <a:r>
+              <a:rPr lang="ru-RU" dirty="0" smtClean="0"/>
+              <a:t>?»</a:t>
+            </a:r>
+          </a:p>
+          <a:p>
+            <a:r>
+              <a:rPr lang="ru-RU" dirty="0"/>
+              <a:t>«Сопоставь схему, словарь каналов, таблицы и текст: везде ли описана одна и та же система?»</a:t>
+            </a:r>
+            <a:endParaRPr lang="en-US" dirty="0" smtClean="0"/>
+          </a:p>
+          <a:p>
+            <a:r>
+              <a:rPr lang="ru-RU" dirty="0"/>
+              <a:t>Сформулируй самый сильный аргумент рецензента против новизны и ответ, который опирается только на имеющиеся доказательства</a:t>
+            </a:r>
+            <a:r>
+              <a:rPr lang="ru-RU" dirty="0" smtClean="0"/>
+              <a:t>».</a:t>
+            </a:r>
+          </a:p>
+          <a:p>
+            <a:r>
+              <a:rPr lang="ru-RU" dirty="0" smtClean="0"/>
+              <a:t>Есть ли общие и </a:t>
+            </a:r>
+            <a:r>
+              <a:rPr lang="en-US" dirty="0" smtClean="0"/>
+              <a:t>downstream</a:t>
+            </a:r>
+            <a:r>
+              <a:rPr lang="ru-RU" dirty="0" smtClean="0"/>
+              <a:t> задачи</a:t>
+            </a:r>
+          </a:p>
+          <a:p>
+            <a:endParaRPr lang="ru-RU" dirty="0" smtClean="0"/>
+          </a:p>
+          <a:p>
+            <a:endParaRPr lang="ru-RU" dirty="0"/>
+          </a:p>
+        </p:txBody>
+      </p:sp>
+      <p:graphicFrame>
+        <p:nvGraphicFramePr>
+          <p:cNvPr id="5" name="Таблица 4"/>
+          <p:cNvGraphicFramePr>
+            <a:graphicFrameLocks noGrp="1"/>
+          </p:cNvGraphicFramePr>
+          <p:nvPr>
+            <p:extLst>
+              <p:ext uri="{D42A27DB-BD31-4B8C-83A1-F6EECF244321}">
+                <p14:modId xmlns:p14="http://schemas.microsoft.com/office/powerpoint/2010/main" val="4123889141"/>
+              </p:ext>
+            </p:extLst>
+          </p:nvPr>
+        </p:nvGraphicFramePr>
+        <p:xfrm>
+          <a:off x="838200" y="5656739"/>
+          <a:ext cx="10515600" cy="365760"/>
+        </p:xfrm>
+        <a:graphic>
+          <a:graphicData uri="http://schemas.openxmlformats.org/drawingml/2006/table">
+            <a:tbl>
+              <a:tblPr/>
+              <a:tblGrid>
+                <a:gridCol w="10515600">
+                  <a:extLst>
+                    <a:ext uri="{9D8B030D-6E8A-4147-A177-3AD203B41FA5}">
+                      <a16:colId xmlns:a16="http://schemas.microsoft.com/office/drawing/2014/main" val="2139541680"/>
+                    </a:ext>
+                  </a:extLst>
+                </a:gridCol>
+              </a:tblGrid>
+              <a:tr h="0">
+                <a:tc>
+                  <a:txBody>
+                    <a:bodyPr/>
+                    <a:lstStyle/>
+                    <a:p>
+                      <a:r>
+                        <a:rPr lang="ru-RU" dirty="0"/>
+                        <a:t>цель написать быстро! </a:t>
+                      </a:r>
+                    </a:p>
+                  </a:txBody>
+                  <a:tcPr anchor="ctr">
+                    <a:lnL>
+                      <a:noFill/>
+                    </a:lnL>
+                    <a:lnR>
+                      <a:noFill/>
+                    </a:lnR>
+                    <a:lnT>
+                      <a:noFill/>
+                    </a:lnT>
+                    <a:lnB>
+                      <a:noFill/>
+                    </a:lnB>
+                  </a:tcPr>
+                </a:tc>
+                <a:extLst>
+                  <a:ext uri="{0D108BD9-81ED-4DB2-BD59-A6C34878D82A}">
+                    <a16:rowId xmlns:a16="http://schemas.microsoft.com/office/drawing/2014/main" val="2778001172"/>
+                  </a:ext>
+                </a:extLst>
+              </a:tr>
+            </a:tbl>
+          </a:graphicData>
+        </a:graphic>
+      </p:graphicFrame>
+    </p:spTree>
+    <p:extLst>
+      <p:ext uri="{BB962C8B-B14F-4D97-AF65-F5344CB8AC3E}">
+        <p14:creationId xmlns:p14="http://schemas.microsoft.com/office/powerpoint/2010/main" val="3647917906"/>
+      </p:ext>
+    </p:extLst>
+  </p:cSld>
+  <p:clrMapOvr>
+    <a:masterClrMapping/>
+  </p:clrMapOvr>
+</p:sld>
+</file>
+
+<file path=ppt/slides/slide12.xml><?xml version="1.0" encoding="utf-8"?>
+<p:sld xmlns:a="http://schemas.openxmlformats.org/drawingml/2006/main" xmlns:r="http://schemas.openxmlformats.org/officeDocument/2006/relationships" xmlns:p="http://schemas.openxmlformats.org/presentationml/2006/main">
+  <p:cSld>
+    <p:spTree>
+      <p:nvGrpSpPr>
+        <p:cNvPr id="1" name=""/>
+        <p:cNvGrpSpPr/>
+        <p:nvPr/>
+      </p:nvGrpSpPr>
+      <p:grpSpPr>
+        <a:xfrm>
+          <a:off x="0" y="0"/>
+          <a:ext cx="0" cy="0"/>
+          <a:chOff x="0" y="0"/>
+          <a:chExt cx="0" cy="0"/>
+        </a:xfrm>
+      </p:grpSpPr>
+      <p:sp>
+        <p:nvSpPr>
+          <p:cNvPr id="2" name="Заголовок 1"/>
+          <p:cNvSpPr>
+            <a:spLocks noGrp="1"/>
+          </p:cNvSpPr>
+          <p:nvPr>
+            <p:ph type="title"/>
+          </p:nvPr>
+        </p:nvSpPr>
+        <p:spPr/>
+        <p:txBody>
+          <a:bodyPr/>
+          <a:lstStyle/>
+          <a:p>
+            <a:endParaRPr lang="ru-RU"/>
+          </a:p>
+        </p:txBody>
+      </p:sp>
+      <p:sp>
+        <p:nvSpPr>
+          <p:cNvPr id="3" name="Объект 2"/>
+          <p:cNvSpPr>
+            <a:spLocks noGrp="1"/>
+          </p:cNvSpPr>
+          <p:nvPr>
+            <p:ph idx="1"/>
+          </p:nvPr>
+        </p:nvSpPr>
+        <p:spPr/>
+        <p:txBody>
+          <a:bodyPr>
+            <a:normAutofit/>
+          </a:bodyPr>
+          <a:lstStyle/>
+          <a:p>
+            <a:r>
+              <a:rPr lang="ru-RU" dirty="0" smtClean="0"/>
+              <a:t>Стиль рецензирования по тексту</a:t>
+            </a:r>
+          </a:p>
+          <a:p>
+            <a:r>
+              <a:rPr lang="ru-RU" dirty="0" smtClean="0"/>
+              <a:t>Пиши Было Стало Причина изменения, раздел/подраздел</a:t>
+            </a:r>
+          </a:p>
+          <a:p>
+            <a:endParaRPr lang="ru-RU" dirty="0"/>
+          </a:p>
+          <a:p>
+            <a:r>
+              <a:rPr lang="ru-RU" dirty="0" smtClean="0"/>
+              <a:t>Опросите несколько </a:t>
             </a:r>
             <a:r>
               <a:rPr lang="ru-RU" dirty="0" err="1" smtClean="0"/>
-              <a:t>Sensors</a:t>
+              <a:t>Нейронок</a:t>
+            </a:r>
+            <a:r>
+              <a:rPr lang="ru-RU" dirty="0" smtClean="0"/>
+              <a:t> и попросите одну найти общие замечания . И симпатизировать </a:t>
+            </a:r>
+            <a:br>
+              <a:rPr lang="ru-RU" dirty="0" smtClean="0"/>
+            </a:br>
+            <a:r>
+              <a:rPr lang="ru-RU" dirty="0" smtClean="0"/>
+              <a:t/>
+            </a:r>
+            <a:br>
+              <a:rPr lang="ru-RU" dirty="0" smtClean="0"/>
+            </a:br>
+            <a:r>
+              <a:rPr lang="ru-RU" dirty="0" smtClean="0"/>
+              <a:t>надо делать </a:t>
+            </a:r>
+            <a:r>
+              <a:rPr lang="ru-RU" dirty="0" err="1" smtClean="0"/>
+              <a:t>конвейерно</a:t>
             </a:r>
             <a:r>
               <a:rPr lang="ru-RU" dirty="0" smtClean="0"/>
@@ -3219,607 +3585,11 @@
             </a:r>
             <a:r>
               <a:rPr lang="ru-RU" dirty="0" err="1" smtClean="0"/>
-              <a:t>Journal</a:t>
-            </a:r>
-            <a:r>
-              <a:rPr lang="ru-RU" dirty="0" smtClean="0"/>
-              <a:t>, IEEE </a:t>
-            </a:r>
-            <a:r>
-              <a:rPr lang="ru-RU" dirty="0" err="1" smtClean="0"/>
-              <a:t>Transactions</a:t>
-            </a:r>
-            <a:r>
-              <a:rPr lang="ru-RU" dirty="0" smtClean="0"/>
-              <a:t> </a:t>
-            </a:r>
-          </a:p>
-          <a:p>
-            <a:r>
-              <a:rPr lang="ru-RU" dirty="0" err="1" smtClean="0"/>
-              <a:t>on</a:t>
-            </a:r>
-            <a:r>
-              <a:rPr lang="ru-RU" dirty="0" smtClean="0"/>
-              <a:t> </a:t>
-            </a:r>
-            <a:r>
-              <a:rPr lang="ru-RU" dirty="0" err="1" smtClean="0"/>
-              <a:t>Instrumentation</a:t>
-            </a:r>
-            <a:r>
-              <a:rPr lang="ru-RU" dirty="0" smtClean="0"/>
-              <a:t> </a:t>
-            </a:r>
-            <a:r>
-              <a:rPr lang="ru-RU" dirty="0" err="1" smtClean="0"/>
-              <a:t>and</a:t>
-            </a:r>
-            <a:r>
-              <a:rPr lang="ru-RU" dirty="0" smtClean="0"/>
-              <a:t> </a:t>
-            </a:r>
-            <a:r>
-              <a:rPr lang="ru-RU" dirty="0" err="1" smtClean="0"/>
-              <a:t>Measurement</a:t>
-            </a:r>
-            <a:r>
-              <a:rPr lang="ru-RU" dirty="0" smtClean="0"/>
-              <a:t> (TIM), IEEE TIA/TII и смежных инженерных журналов, </a:t>
-            </a:r>
-          </a:p>
-          <a:p>
-            <a:r>
-              <a:rPr lang="ru-RU" dirty="0" smtClean="0"/>
-              <a:t>специализирующийся на стыке анализа данных (ML/DSP) и инженерных задач </a:t>
-            </a:r>
-          </a:p>
-          <a:p>
-            <a:r>
-              <a:rPr lang="ru-RU" dirty="0" smtClean="0"/>
-              <a:t>(</a:t>
-            </a:r>
-            <a:r>
-              <a:rPr lang="ru-RU" dirty="0" err="1" smtClean="0"/>
-              <a:t>сенсорика</a:t>
-            </a:r>
-            <a:r>
-              <a:rPr lang="ru-RU" dirty="0" smtClean="0"/>
-              <a:t>, измерения, диагностика, прогнозное обслуживание, </a:t>
-            </a:r>
-            <a:r>
-              <a:rPr lang="ru-RU" dirty="0" err="1" smtClean="0"/>
-              <a:t>soft</a:t>
-            </a:r>
-            <a:r>
-              <a:rPr lang="ru-RU" dirty="0" smtClean="0"/>
-              <a:t> </a:t>
-            </a:r>
-            <a:r>
-              <a:rPr lang="ru-RU" dirty="0" err="1" smtClean="0"/>
-              <a:t>sensors</a:t>
-            </a:r>
-            <a:r>
-              <a:rPr lang="ru-RU" dirty="0" smtClean="0"/>
-              <a:t>).</a:t>
-            </a:r>
-          </a:p>
-          <a:p>
-            <a:endParaRPr lang="ru-RU" dirty="0" smtClean="0"/>
-          </a:p>
-          <a:p>
-            <a:r>
-              <a:rPr lang="ru-RU" dirty="0" smtClean="0"/>
-              <a:t>Помоги довести мою статью до уровня, проходящего рецензирование.</a:t>
-            </a:r>
-          </a:p>
-          <a:p>
-            <a:endParaRPr lang="ru-RU" dirty="0" smtClean="0"/>
-          </a:p>
-          <a:p>
-            <a:r>
-              <a:rPr lang="ru-RU" dirty="0" smtClean="0"/>
-              <a:t>Контекст (заполню при необходимости):</a:t>
-            </a:r>
-          </a:p>
-          <a:p>
-            <a:r>
-              <a:rPr lang="ru-RU" dirty="0" smtClean="0"/>
-              <a:t>- Черновик/фрагмент: [...]</a:t>
-            </a:r>
-          </a:p>
-          <a:p>
-            <a:r>
-              <a:rPr lang="ru-RU" dirty="0" smtClean="0"/>
-              <a:t>- Целевой журнал: [...]</a:t>
-            </a:r>
-          </a:p>
-          <a:p>
-            <a:r>
-              <a:rPr lang="ru-RU" dirty="0" smtClean="0"/>
-              <a:t>- Тип заявки: </a:t>
-            </a:r>
-            <a:r>
-              <a:rPr lang="ru-RU" dirty="0" err="1" smtClean="0"/>
-              <a:t>regular</a:t>
-            </a:r>
-            <a:r>
-              <a:rPr lang="ru-RU" dirty="0" smtClean="0"/>
-              <a:t> </a:t>
-            </a:r>
-            <a:r>
-              <a:rPr lang="ru-RU" dirty="0" err="1" smtClean="0"/>
-              <a:t>paper</a:t>
-            </a:r>
-            <a:r>
-              <a:rPr lang="ru-RU" dirty="0" smtClean="0"/>
-              <a:t> / </a:t>
-            </a:r>
-            <a:r>
-              <a:rPr lang="ru-RU" dirty="0" err="1" smtClean="0"/>
-              <a:t>letter</a:t>
-            </a:r>
-            <a:endParaRPr lang="ru-RU" dirty="0" smtClean="0"/>
-          </a:p>
-          <a:p>
-            <a:r>
-              <a:rPr lang="ru-RU" dirty="0" smtClean="0"/>
-              <a:t>- Стадия работы: концепция / скелет / черновик / ревизия</a:t>
-            </a:r>
-          </a:p>
-          <a:p>
-            <a:endParaRPr lang="ru-RU" dirty="0" smtClean="0"/>
-          </a:p>
-          <a:p>
-            <a:r>
-              <a:rPr lang="ru-RU" dirty="0" smtClean="0"/>
-              <a:t>Режимы работы (указываю в начале сообщения):</a:t>
-            </a:r>
-          </a:p>
-          <a:p>
-            <a:r>
-              <a:rPr lang="ru-RU" dirty="0" smtClean="0"/>
-              <a:t>1. AUDIT — оцени текст по критериям ниже. Формат вывода: таблица </a:t>
-            </a:r>
-          </a:p>
-          <a:p>
-            <a:r>
-              <a:rPr lang="ru-RU" dirty="0" smtClean="0"/>
-              <a:t>   (критерий | оценка 0–5 | цитата из текста | конкретная правка «было → стало»).</a:t>
-            </a:r>
-          </a:p>
-          <a:p>
-            <a:r>
-              <a:rPr lang="ru-RU" dirty="0" smtClean="0"/>
-              <a:t>2. COACH — задай мне серию вопросов, чтобы прояснить: </a:t>
-            </a:r>
-            <a:r>
-              <a:rPr lang="ru-RU" dirty="0" err="1" smtClean="0"/>
-              <a:t>gap</a:t>
-            </a:r>
-            <a:r>
-              <a:rPr lang="ru-RU" dirty="0" smtClean="0"/>
-              <a:t>, цель, вклад, </a:t>
-            </a:r>
-          </a:p>
-          <a:p>
-            <a:r>
-              <a:rPr lang="ru-RU" dirty="0" smtClean="0"/>
-              <a:t>   целевую аудиторию и выбор журнала. Не пиши текст за меня.</a:t>
-            </a:r>
-          </a:p>
-          <a:p>
-            <a:r>
-              <a:rPr lang="ru-RU" dirty="0" smtClean="0"/>
-              <a:t>3. DRAFT — напиши/перепиши фрагмент в стиле IEEE: формальный английский, </a:t>
-            </a:r>
-          </a:p>
-          <a:p>
-            <a:r>
-              <a:rPr lang="ru-RU" dirty="0" smtClean="0"/>
-              <a:t>   настоящее время для фактов, активный залог, без гипербол и клише.</a:t>
-            </a:r>
-          </a:p>
-          <a:p>
-            <a:r>
-              <a:rPr lang="ru-RU" dirty="0" smtClean="0"/>
-              <a:t>4. REVIEW — смоделируй строгого рецензента: </a:t>
-            </a:r>
-            <a:r>
-              <a:rPr lang="ru-RU" dirty="0" err="1" smtClean="0"/>
-              <a:t>major</a:t>
-            </a:r>
-            <a:r>
-              <a:rPr lang="ru-RU" dirty="0" smtClean="0"/>
-              <a:t> </a:t>
-            </a:r>
-            <a:r>
-              <a:rPr lang="ru-RU" dirty="0" err="1" smtClean="0"/>
-              <a:t>comments</a:t>
-            </a:r>
-            <a:r>
-              <a:rPr lang="ru-RU" dirty="0" smtClean="0"/>
-              <a:t>, </a:t>
-            </a:r>
-            <a:r>
-              <a:rPr lang="ru-RU" dirty="0" err="1" smtClean="0"/>
-              <a:t>minor</a:t>
-            </a:r>
-            <a:r>
-              <a:rPr lang="ru-RU" dirty="0" smtClean="0"/>
-              <a:t> </a:t>
-            </a:r>
-            <a:r>
-              <a:rPr lang="ru-RU" dirty="0" err="1" smtClean="0"/>
-              <a:t>comments</a:t>
-            </a:r>
-            <a:r>
-              <a:rPr lang="ru-RU" dirty="0" smtClean="0"/>
-              <a:t>, </a:t>
-            </a:r>
-          </a:p>
-          <a:p>
-            <a:r>
-              <a:rPr lang="ru-RU" dirty="0" smtClean="0"/>
-              <a:t>   вопрос про </a:t>
-            </a:r>
-            <a:r>
-              <a:rPr lang="ru-RU" dirty="0" err="1" smtClean="0"/>
-              <a:t>relevance</a:t>
-            </a:r>
-            <a:r>
-              <a:rPr lang="ru-RU" dirty="0" smtClean="0"/>
-              <a:t> </a:t>
-            </a:r>
-            <a:r>
-              <a:rPr lang="ru-RU" dirty="0" err="1" smtClean="0"/>
-              <a:t>to</a:t>
-            </a:r>
-            <a:r>
-              <a:rPr lang="ru-RU" dirty="0" smtClean="0"/>
-              <a:t> </a:t>
-            </a:r>
-            <a:r>
-              <a:rPr lang="ru-RU" dirty="0" err="1" smtClean="0"/>
-              <a:t>scope</a:t>
-            </a:r>
-            <a:r>
-              <a:rPr lang="ru-RU" dirty="0" smtClean="0"/>
-              <a:t>, оценка </a:t>
-            </a:r>
-            <a:r>
-              <a:rPr lang="ru-RU" dirty="0" err="1" smtClean="0"/>
-              <a:t>reject</a:t>
-            </a:r>
-            <a:r>
-              <a:rPr lang="ru-RU" dirty="0" smtClean="0"/>
-              <a:t> / </a:t>
-            </a:r>
-            <a:r>
-              <a:rPr lang="ru-RU" dirty="0" err="1" smtClean="0"/>
-              <a:t>major</a:t>
-            </a:r>
-            <a:r>
-              <a:rPr lang="ru-RU" dirty="0" smtClean="0"/>
-              <a:t> </a:t>
-            </a:r>
-            <a:r>
-              <a:rPr lang="ru-RU" dirty="0" err="1" smtClean="0"/>
-              <a:t>revision</a:t>
-            </a:r>
-            <a:r>
-              <a:rPr lang="ru-RU" dirty="0" smtClean="0"/>
-              <a:t> / </a:t>
-            </a:r>
-            <a:r>
-              <a:rPr lang="ru-RU" dirty="0" err="1" smtClean="0"/>
-              <a:t>minor</a:t>
-            </a:r>
-            <a:r>
-              <a:rPr lang="ru-RU" dirty="0" smtClean="0"/>
-              <a:t> </a:t>
-            </a:r>
-            <a:r>
-              <a:rPr lang="ru-RU" dirty="0" err="1" smtClean="0"/>
-              <a:t>revision</a:t>
-            </a:r>
-            <a:r>
-              <a:rPr lang="ru-RU" dirty="0" smtClean="0"/>
-              <a:t>.</a:t>
-            </a:r>
-          </a:p>
-          <a:p>
-            <a:endParaRPr lang="ru-RU" dirty="0" smtClean="0"/>
-          </a:p>
-          <a:p>
-            <a:r>
-              <a:rPr lang="ru-RU" dirty="0" smtClean="0"/>
-              <a:t>Критерии оценки:</a:t>
-            </a:r>
-          </a:p>
-          <a:p>
-            <a:r>
-              <a:rPr lang="ru-RU" dirty="0" smtClean="0"/>
-              <a:t>1. Одна статья — одно заявление: цель, новизна, вклад согласованы, не «расползаются».</a:t>
-            </a:r>
-          </a:p>
-          <a:p>
-            <a:r>
-              <a:rPr lang="ru-RU" dirty="0" smtClean="0"/>
-              <a:t>2. </a:t>
-            </a:r>
-            <a:r>
-              <a:rPr lang="ru-RU" dirty="0" err="1" smtClean="0"/>
-              <a:t>Gap</a:t>
-            </a:r>
-            <a:r>
-              <a:rPr lang="ru-RU" dirty="0" smtClean="0"/>
-              <a:t>: сформулирован через ограничения конкретных существующих работ </a:t>
-            </a:r>
-          </a:p>
-          <a:p>
-            <a:r>
-              <a:rPr lang="ru-RU" dirty="0" smtClean="0"/>
-              <a:t>   (кто и что сделал, при каких условиях это не работает), а не «по теме мало статей».</a:t>
-            </a:r>
-          </a:p>
-          <a:p>
-            <a:r>
-              <a:rPr lang="ru-RU" dirty="0" smtClean="0"/>
-              <a:t>3. Новизна: новый метод для известной задачи ИЛИ известный метод для новой задачи </a:t>
-            </a:r>
-          </a:p>
-          <a:p>
-            <a:r>
-              <a:rPr lang="ru-RU" dirty="0" smtClean="0"/>
-              <a:t>   с обоснованием, почему существующие подходы неприменимы.</a:t>
-            </a:r>
-          </a:p>
-          <a:p>
-            <a:r>
-              <a:rPr lang="ru-RU" dirty="0" smtClean="0"/>
-              <a:t>4. Вклад: 3–4 проверяемых пункта (формулировка, метод, </a:t>
-            </a:r>
-            <a:r>
-              <a:rPr lang="ru-RU" dirty="0" err="1" smtClean="0"/>
-              <a:t>валидация</a:t>
-            </a:r>
-            <a:r>
-              <a:rPr lang="ru-RU" dirty="0" smtClean="0"/>
-              <a:t> на реальных </a:t>
-            </a:r>
-          </a:p>
-          <a:p>
-            <a:r>
-              <a:rPr lang="ru-RU" dirty="0" smtClean="0"/>
-              <a:t>   данных, открытый код/данные). Каждый пункт нужен кому-то в сообществе.</a:t>
-            </a:r>
-          </a:p>
-          <a:p>
-            <a:r>
-              <a:rPr lang="ru-RU" dirty="0" smtClean="0"/>
-              <a:t>5. Инженерная значимость: обсуждены ограничения реального применения — </a:t>
-            </a:r>
-          </a:p>
-          <a:p>
-            <a:r>
-              <a:rPr lang="ru-RU" dirty="0" smtClean="0"/>
-              <a:t>   вычислительная сложность, </a:t>
-            </a:r>
-            <a:r>
-              <a:rPr lang="ru-RU" dirty="0" err="1" smtClean="0"/>
-              <a:t>latency</a:t>
-            </a:r>
-            <a:r>
-              <a:rPr lang="ru-RU" dirty="0" smtClean="0"/>
-              <a:t>, память/</a:t>
-            </a:r>
-            <a:r>
-              <a:rPr lang="ru-RU" dirty="0" err="1" smtClean="0"/>
-              <a:t>edge</a:t>
-            </a:r>
-            <a:r>
-              <a:rPr lang="ru-RU" dirty="0" smtClean="0"/>
-              <a:t>, стоимость, </a:t>
-            </a:r>
-            <a:r>
-              <a:rPr lang="ru-RU" dirty="0" err="1" smtClean="0"/>
-              <a:t>robustness</a:t>
-            </a:r>
-            <a:r>
-              <a:rPr lang="ru-RU" dirty="0" smtClean="0"/>
-              <a:t>, </a:t>
-            </a:r>
-            <a:r>
-              <a:rPr lang="ru-RU" dirty="0" err="1" smtClean="0"/>
-              <a:t>drift</a:t>
-            </a:r>
-            <a:r>
-              <a:rPr lang="ru-RU" dirty="0" smtClean="0"/>
-              <a:t>.</a:t>
-            </a:r>
-          </a:p>
-          <a:p>
-            <a:r>
-              <a:rPr lang="ru-RU" dirty="0" smtClean="0"/>
-              <a:t>6. Метрологическая строгость (для TIM): погрешность/неопределённость оценена, </a:t>
-            </a:r>
-          </a:p>
-          <a:p>
-            <a:r>
-              <a:rPr lang="ru-RU" dirty="0" smtClean="0"/>
-              <a:t>   а не только </a:t>
-            </a:r>
-            <a:r>
-              <a:rPr lang="ru-RU" dirty="0" err="1" smtClean="0"/>
-              <a:t>accuracy</a:t>
-            </a:r>
-            <a:r>
-              <a:rPr lang="ru-RU" dirty="0" smtClean="0"/>
-              <a:t>; корректные сравнения, </a:t>
-            </a:r>
-            <a:r>
-              <a:rPr lang="ru-RU" dirty="0" err="1" smtClean="0"/>
-              <a:t>воспроизводимость</a:t>
-            </a:r>
-            <a:r>
-              <a:rPr lang="ru-RU" dirty="0" smtClean="0"/>
-              <a:t>.</a:t>
-            </a:r>
-          </a:p>
-          <a:p>
-            <a:r>
-              <a:rPr lang="ru-RU" dirty="0" smtClean="0"/>
-              <a:t>7. Эксперименты: </a:t>
-            </a:r>
-            <a:r>
-              <a:rPr lang="ru-RU" dirty="0" err="1" smtClean="0"/>
-              <a:t>baseline</a:t>
-            </a:r>
-            <a:r>
-              <a:rPr lang="ru-RU" dirty="0" smtClean="0"/>
-              <a:t>-сравнение с SOTA, </a:t>
-            </a:r>
-            <a:r>
-              <a:rPr lang="ru-RU" dirty="0" err="1" smtClean="0"/>
-              <a:t>ablation</a:t>
-            </a:r>
-            <a:r>
-              <a:rPr lang="ru-RU" dirty="0" smtClean="0"/>
-              <a:t> </a:t>
-            </a:r>
-            <a:r>
-              <a:rPr lang="ru-RU" dirty="0" err="1" smtClean="0"/>
-              <a:t>study</a:t>
-            </a:r>
-            <a:r>
-              <a:rPr lang="ru-RU" dirty="0" smtClean="0"/>
-              <a:t>, отсутствие </a:t>
-            </a:r>
-          </a:p>
-          <a:p>
-            <a:r>
-              <a:rPr lang="ru-RU" dirty="0" smtClean="0"/>
-              <a:t>   </a:t>
-            </a:r>
-            <a:r>
-              <a:rPr lang="ru-RU" dirty="0" err="1" smtClean="0"/>
-              <a:t>data</a:t>
-            </a:r>
-            <a:r>
-              <a:rPr lang="ru-RU" dirty="0" smtClean="0"/>
-              <a:t> </a:t>
-            </a:r>
-            <a:r>
-              <a:rPr lang="ru-RU" dirty="0" err="1" smtClean="0"/>
-              <a:t>leakage</a:t>
-            </a:r>
-            <a:r>
-              <a:rPr lang="ru-RU" dirty="0" smtClean="0"/>
-              <a:t>, честное разбиение </a:t>
-            </a:r>
-            <a:r>
-              <a:rPr lang="ru-RU" dirty="0" err="1" smtClean="0"/>
-              <a:t>train</a:t>
-            </a:r>
-            <a:r>
-              <a:rPr lang="ru-RU" dirty="0" smtClean="0"/>
-              <a:t>/</a:t>
-            </a:r>
-            <a:r>
-              <a:rPr lang="ru-RU" dirty="0" err="1" smtClean="0"/>
-              <a:t>val</a:t>
-            </a:r>
-            <a:r>
-              <a:rPr lang="ru-RU" dirty="0" smtClean="0"/>
-              <a:t>/</a:t>
-            </a:r>
-            <a:r>
-              <a:rPr lang="ru-RU" dirty="0" err="1" smtClean="0"/>
-              <a:t>test</a:t>
-            </a:r>
-            <a:r>
-              <a:rPr lang="ru-RU" dirty="0" smtClean="0"/>
-              <a:t>, указаны </a:t>
-            </a:r>
-            <a:r>
-              <a:rPr lang="ru-RU" dirty="0" err="1" smtClean="0"/>
-              <a:t>seeds</a:t>
-            </a:r>
-            <a:r>
-              <a:rPr lang="ru-RU" dirty="0" smtClean="0"/>
-              <a:t> и </a:t>
-            </a:r>
-            <a:r>
-              <a:rPr lang="ru-RU" dirty="0" err="1" smtClean="0"/>
-              <a:t>hardware</a:t>
-            </a:r>
-            <a:r>
-              <a:rPr lang="ru-RU" dirty="0" smtClean="0"/>
-              <a:t>.</a:t>
-            </a:r>
-          </a:p>
-          <a:p>
-            <a:r>
-              <a:rPr lang="ru-RU" dirty="0" smtClean="0"/>
-              <a:t>8. Терминология: единая, минимально необходимая, есть таблица обозначений.</a:t>
-            </a:r>
-          </a:p>
-          <a:p>
-            <a:r>
-              <a:rPr lang="ru-RU" dirty="0" smtClean="0"/>
-              <a:t>9. Принцип Оккама: нет лишних сущностей ни в тексте, ни в методе.</a:t>
-            </a:r>
-          </a:p>
-          <a:p>
-            <a:r>
-              <a:rPr lang="ru-RU" dirty="0" smtClean="0"/>
-              <a:t>10. Рисунки/таблицы: подписи самодостаточны, каждый элемент имеет цель </a:t>
-            </a:r>
-          </a:p>
-          <a:p>
-            <a:r>
-              <a:rPr lang="ru-RU" dirty="0" smtClean="0"/>
-              <a:t>    и прокомментирован в тексте.</a:t>
-            </a:r>
-          </a:p>
-          <a:p>
-            <a:endParaRPr lang="ru-RU" dirty="0" smtClean="0"/>
-          </a:p>
-          <a:p>
-            <a:r>
-              <a:rPr lang="ru-RU" dirty="0" smtClean="0"/>
-              <a:t>Жёсткие правила:</a:t>
-            </a:r>
-          </a:p>
-          <a:p>
-            <a:r>
-              <a:rPr lang="ru-RU" dirty="0" smtClean="0"/>
-              <a:t>- Не выдумывай ссылки на литературу. Нужен источник — пиши [REF: описание искомой работы].</a:t>
-            </a:r>
-          </a:p>
-          <a:p>
-            <a:r>
-              <a:rPr lang="ru-RU" dirty="0" smtClean="0"/>
-              <a:t>- Не хвали текст. Сначала 3 главные проблемы, потом детали.</a:t>
-            </a:r>
-          </a:p>
-          <a:p>
-            <a:r>
-              <a:rPr lang="ru-RU" dirty="0" smtClean="0"/>
-              <a:t>- Если данных/чисел нет — ставь [TODO], не придумывай.</a:t>
-            </a:r>
-          </a:p>
-          <a:p>
-            <a:r>
-              <a:rPr lang="ru-RU" dirty="0" smtClean="0"/>
-              <a:t>- Все правки давай парами «было → стало» с объяснением причины.</a:t>
-            </a:r>
-          </a:p>
-          <a:p>
-            <a:r>
-              <a:rPr lang="ru-RU" dirty="0" smtClean="0"/>
-              <a:t>- Отвечай на языке черновика; технические термины оставляй на английском.</a:t>
+              <a:t>типиовые</a:t>
+            </a:r>
+            <a:r>
+              <a:rPr lang="ru-RU" dirty="0" smtClean="0"/>
+              <a:t> операции небольшие, без лишних дум.</a:t>
             </a:r>
             <a:endParaRPr lang="ru-RU" dirty="0"/>
           </a:p>
@@ -3829,6 +3599,216 @@
     <p:extLst>
       <p:ext uri="{BB962C8B-B14F-4D97-AF65-F5344CB8AC3E}">
         <p14:creationId xmlns:p14="http://schemas.microsoft.com/office/powerpoint/2010/main" val="2989031771"/>
+      </p:ext>
+    </p:extLst>
+  </p:cSld>
+  <p:clrMapOvr>
+    <a:masterClrMapping/>
+  </p:clrMapOvr>
+  <p:timing>
+    <p:tnLst>
+      <p:par>
+        <p:cTn id="1" dur="indefinite" restart="never" nodeType="tmRoot"/>
+      </p:par>
+    </p:tnLst>
+  </p:timing>
+</p:sld>
+</file>
+
+<file path=ppt/slides/slide13.xml><?xml version="1.0" encoding="utf-8"?>
+<p:sld xmlns:a="http://schemas.openxmlformats.org/drawingml/2006/main" xmlns:r="http://schemas.openxmlformats.org/officeDocument/2006/relationships" xmlns:p="http://schemas.openxmlformats.org/presentationml/2006/main">
+  <p:cSld>
+    <p:spTree>
+      <p:nvGrpSpPr>
+        <p:cNvPr id="1" name=""/>
+        <p:cNvGrpSpPr/>
+        <p:nvPr/>
+      </p:nvGrpSpPr>
+      <p:grpSpPr>
+        <a:xfrm>
+          <a:off x="0" y="0"/>
+          <a:ext cx="0" cy="0"/>
+          <a:chOff x="0" y="0"/>
+          <a:chExt cx="0" cy="0"/>
+        </a:xfrm>
+      </p:grpSpPr>
+      <p:sp>
+        <p:nvSpPr>
+          <p:cNvPr id="2" name="Заголовок 1"/>
+          <p:cNvSpPr>
+            <a:spLocks noGrp="1"/>
+          </p:cNvSpPr>
+          <p:nvPr>
+            <p:ph type="title"/>
+          </p:nvPr>
+        </p:nvSpPr>
+        <p:spPr/>
+        <p:txBody>
+          <a:bodyPr/>
+          <a:lstStyle/>
+          <a:p>
+            <a:endParaRPr lang="ru-RU"/>
+          </a:p>
+        </p:txBody>
+      </p:sp>
+      <p:sp>
+        <p:nvSpPr>
+          <p:cNvPr id="3" name="Объект 2"/>
+          <p:cNvSpPr>
+            <a:spLocks noGrp="1"/>
+          </p:cNvSpPr>
+          <p:nvPr>
+            <p:ph idx="1"/>
+          </p:nvPr>
+        </p:nvSpPr>
+        <p:spPr/>
+        <p:txBody>
+          <a:bodyPr/>
+          <a:lstStyle/>
+          <a:p>
+            <a:r>
+              <a:rPr lang="ru-RU" dirty="0" smtClean="0"/>
+              <a:t>Правило для текстов</a:t>
+            </a:r>
+          </a:p>
+          <a:p>
+            <a:r>
+              <a:rPr lang="ru-RU" dirty="0" smtClean="0"/>
+              <a:t>1 используй один и </a:t>
+            </a:r>
+            <a:r>
+              <a:rPr lang="ru-RU" dirty="0" err="1" smtClean="0"/>
+              <a:t>тото</a:t>
+            </a:r>
+            <a:r>
+              <a:rPr lang="ru-RU" dirty="0" smtClean="0"/>
+              <a:t> </a:t>
+            </a:r>
+            <a:r>
+              <a:rPr lang="ru-RU" dirty="0" err="1" smtClean="0"/>
+              <a:t>жее</a:t>
+            </a:r>
+            <a:r>
+              <a:rPr lang="ru-RU" dirty="0" smtClean="0"/>
+              <a:t> словарь терминов и обозначений и </a:t>
+            </a:r>
+            <a:r>
+              <a:rPr lang="ru-RU" dirty="0" err="1" smtClean="0"/>
+              <a:t>авыведи</a:t>
+            </a:r>
+            <a:r>
+              <a:rPr lang="ru-RU" dirty="0" smtClean="0"/>
+              <a:t> его. </a:t>
+            </a:r>
+          </a:p>
+          <a:p>
+            <a:r>
+              <a:rPr lang="ru-RU" dirty="0" smtClean="0"/>
+              <a:t>Сухой текст без эмоций в академическом стиле</a:t>
+            </a:r>
+          </a:p>
+          <a:p>
+            <a:r>
+              <a:rPr lang="ru-RU" dirty="0" smtClean="0"/>
+              <a:t>Не используй </a:t>
+            </a:r>
+            <a:r>
+              <a:rPr lang="ru-RU" dirty="0" err="1" smtClean="0"/>
+              <a:t>запутыаний</a:t>
+            </a:r>
+            <a:r>
+              <a:rPr lang="ru-RU" dirty="0" smtClean="0"/>
+              <a:t> ссылками между сессиями.</a:t>
+            </a:r>
+          </a:p>
+          <a:p>
+            <a:endParaRPr lang="ru-RU" dirty="0"/>
+          </a:p>
+        </p:txBody>
+      </p:sp>
+    </p:spTree>
+    <p:extLst>
+      <p:ext uri="{BB962C8B-B14F-4D97-AF65-F5344CB8AC3E}">
+        <p14:creationId xmlns:p14="http://schemas.microsoft.com/office/powerpoint/2010/main" val="1032244454"/>
+      </p:ext>
+    </p:extLst>
+  </p:cSld>
+  <p:clrMapOvr>
+    <a:masterClrMapping/>
+  </p:clrMapOvr>
+  <p:timing>
+    <p:tnLst>
+      <p:par>
+        <p:cTn id="1" dur="indefinite" restart="never" nodeType="tmRoot"/>
+      </p:par>
+    </p:tnLst>
+  </p:timing>
+</p:sld>
+</file>
+
+<file path=ppt/slides/slide14.xml><?xml version="1.0" encoding="utf-8"?>
+<p:sld xmlns:a="http://schemas.openxmlformats.org/drawingml/2006/main" xmlns:r="http://schemas.openxmlformats.org/officeDocument/2006/relationships" xmlns:p="http://schemas.openxmlformats.org/presentationml/2006/main">
+  <p:cSld>
+    <p:spTree>
+      <p:nvGrpSpPr>
+        <p:cNvPr id="1" name=""/>
+        <p:cNvGrpSpPr/>
+        <p:nvPr/>
+      </p:nvGrpSpPr>
+      <p:grpSpPr>
+        <a:xfrm>
+          <a:off x="0" y="0"/>
+          <a:ext cx="0" cy="0"/>
+          <a:chOff x="0" y="0"/>
+          <a:chExt cx="0" cy="0"/>
+        </a:xfrm>
+      </p:grpSpPr>
+      <p:sp>
+        <p:nvSpPr>
+          <p:cNvPr id="2" name="Заголовок 1"/>
+          <p:cNvSpPr>
+            <a:spLocks noGrp="1"/>
+          </p:cNvSpPr>
+          <p:nvPr>
+            <p:ph type="title"/>
+          </p:nvPr>
+        </p:nvSpPr>
+        <p:spPr/>
+        <p:txBody>
+          <a:bodyPr/>
+          <a:lstStyle/>
+          <a:p>
+            <a:endParaRPr lang="ru-RU"/>
+          </a:p>
+        </p:txBody>
+      </p:sp>
+      <p:sp>
+        <p:nvSpPr>
+          <p:cNvPr id="3" name="Объект 2"/>
+          <p:cNvSpPr>
+            <a:spLocks noGrp="1"/>
+          </p:cNvSpPr>
+          <p:nvPr>
+            <p:ph idx="1"/>
+          </p:nvPr>
+        </p:nvSpPr>
+        <p:spPr/>
+        <p:txBody>
+          <a:bodyPr/>
+          <a:lstStyle/>
+          <a:p>
+            <a:r>
+              <a:rPr lang="ru-RU" dirty="0" smtClean="0"/>
+              <a:t>Для прототипа следует выбрать 3 похожих статьи. Желательно из того же журнала чтобы на них равняться.</a:t>
+            </a:r>
+            <a:endParaRPr lang="ru-RU" dirty="0"/>
+          </a:p>
+        </p:txBody>
+      </p:sp>
+    </p:spTree>
+    <p:extLst>
+      <p:ext uri="{BB962C8B-B14F-4D97-AF65-F5344CB8AC3E}">
+        <p14:creationId xmlns:p14="http://schemas.microsoft.com/office/powerpoint/2010/main" val="1938957579"/>
       </p:ext>
     </p:extLst>
   </p:cSld>
@@ -4191,11 +4171,7 @@
           <a:p>
             <a:r>
               <a:rPr lang="ru-RU" dirty="0" smtClean="0"/>
-              <a:t>Формулировки статьи подчиняются </a:t>
-            </a:r>
-            <a:r>
-              <a:rPr lang="ru-RU" dirty="0" smtClean="0"/>
-              <a:t>принципу </a:t>
+              <a:t>Формулировки статьи подчиняются принципу </a:t>
             </a:r>
             <a:r>
               <a:rPr lang="ru-RU" dirty="0" err="1" smtClean="0"/>
@@ -4494,7 +4470,6 @@
               <a:rPr lang="ru-RU" dirty="0" smtClean="0"/>
               <a:t> метода, дающее +10% к метрикам.</a:t>
             </a:r>
-            <a:endParaRPr lang="ru-RU" dirty="0" smtClean="0"/>
           </a:p>
           <a:p>
             <a:r>
@@ -4679,11 +4654,7 @@
           <a:p>
             <a:r>
               <a:rPr lang="ru-RU" dirty="0" smtClean="0"/>
-              <a:t>Если </a:t>
-            </a:r>
-            <a:r>
-              <a:rPr lang="ru-RU" dirty="0" smtClean="0"/>
-              <a:t>есть противоречия то их тоже нужно учесть</a:t>
+              <a:t>Если есть противоречия то их тоже нужно учесть</a:t>
             </a:r>
           </a:p>
           <a:p>
